--- a/static/material/UT1_Dia1_presentacion_IAW.pptx
+++ b/static/material/UT1_Dia1_presentacion_IAW.pptx
@@ -777,7 +777,7 @@
           <a:p>
             <a:r>
               <a:rPr lang="en-US" dirty="0"/>
-              <a:t>Cierre, 1 minuto. Recordar la captura del día 1: hasta el lunes a las 23:59.</a:t>
+              <a:t>Cierre, 1 minuto. Recordar el cuaderno del proyecto: hasta el lunes a las 23:59.</a:t>
             </a:r>
             <a:endParaRPr lang="en-US" dirty="0"/>
           </a:p>
@@ -4136,7 +4136,7 @@
                 <a:ea typeface="Arial" pitchFamily="34" charset="-122"/>
                 <a:cs typeface="Arial" pitchFamily="34" charset="-120"/>
               </a:rPr>
-              <a:t>Arranca el proyecto de la UT1</a:t>
+              <a:t>Proyecto, sesión 2</a:t>
             </a:r>
             <a:endParaRPr lang="en-US" sz="1200" dirty="0"/>
           </a:p>
@@ -4243,7 +4243,7 @@
                 <a:ea typeface="Arial" pitchFamily="34" charset="-122"/>
                 <a:cs typeface="Arial" pitchFamily="34" charset="-120"/>
               </a:rPr>
-              <a:t>Instalamos estas piezas en tu máquina virtual.</a:t>
+              <a:t>Instaláis Apache, MySQL y PHP en el servidor de hoy.</a:t>
             </a:r>
             <a:endParaRPr lang="en-US" sz="1200" dirty="0"/>
           </a:p>
